--- a/examples/checklist-carousel.pptx
+++ b/examples/checklist-carousel.pptx
@@ -1389,72 +1389,39 @@
           <a:ln/>
         </p:spPr>
       </p:sp>
-      <p:sp>
-        <p:nvSpPr>
-          <p:cNvPr id="3" name="Shape 1"/>
-          <p:cNvSpPr/>
+      <p:pic>
+        <p:nvPicPr>
+          <p:cNvPr id="3" name="Image 0" descr="preencoded.png">    </p:cNvPr>
+          <p:cNvPicPr>
+            <a:picLocks noChangeAspect="1"/>
+          </p:cNvPicPr>
           <p:nvPr/>
-        </p:nvSpPr>
+        </p:nvPicPr>
+        <p:blipFill>
+          <a:blip r:embed="rId1">
+            <a:extLst>
+              <a:ext uri="{96DAC541-7B7A-43D3-8B79-37D633B846F1}">
+                <asvg:svgBlip xmlns:asvg="http://schemas.microsoft.com/office/drawing/2016/SVG/main" r:embed="rId2"/>
+              </a:ext>
+            </a:extLst>
+          </a:blip>
+          <a:stretch>
+            <a:fillRect/>
+          </a:stretch>
+        </p:blipFill>
         <p:spPr>
           <a:xfrm>
             <a:off x="1333500" y="1905000"/>
             <a:ext cx="857250" cy="857250"/>
           </a:xfrm>
-          <a:prstGeom prst="roundRect">
-            <a:avLst/>
-          </a:prstGeom>
-          <a:solidFill>
-            <a:srgbClr val="FFFFFF">
-              <a:alpha val="15000"/>
-            </a:srgbClr>
-          </a:solidFill>
-          <a:ln w="12700">
-            <a:solidFill>
-              <a:srgbClr val="FFFFFF"/>
-            </a:solidFill>
-            <a:prstDash val="dash"/>
-          </a:ln>
-        </p:spPr>
-      </p:sp>
-      <p:sp>
-        <p:nvSpPr>
-          <p:cNvPr id="4" name="Text 2"/>
-          <p:cNvSpPr/>
-          <p:nvPr/>
-        </p:nvSpPr>
-        <p:spPr>
-          <a:xfrm>
-            <a:off x="1333500" y="1905000"/>
-            <a:ext cx="857250" cy="857250"/>
-          </a:xfrm>
           <a:prstGeom prst="rect">
             <a:avLst/>
           </a:prstGeom>
-          <a:noFill/>
-          <a:ln/>
-        </p:spPr>
-        <p:txBody>
-          <a:bodyPr wrap="square" rtlCol="0" anchor="ctr"/>
-          <a:lstStyle/>
-          <a:p>
-            <a:pPr algn="ctr" indent="0" marL="0">
-              <a:buNone/>
-            </a:pPr>
-            <a:r>
-              <a:rPr lang="en-US" sz="800" dirty="0">
-                <a:solidFill>
-                  <a:srgbClr val="FFFFFF"/>
-                </a:solidFill>
-              </a:rPr>
-              <a:t>check</a:t>
-            </a:r>
-            <a:endParaRPr lang="en-US" sz="800" dirty="0"/>
-          </a:p>
-        </p:txBody>
-      </p:sp>
-      <p:sp>
-        <p:nvSpPr>
-          <p:cNvPr id="5" name="Text 3"/>
+        </p:spPr>
+      </p:pic>
+      <p:sp>
+        <p:nvSpPr>
+          <p:cNvPr id="4" name="Text 1"/>
           <p:cNvSpPr/>
           <p:nvPr/>
         </p:nvSpPr>
@@ -1496,7 +1463,7 @@
       </p:sp>
       <p:sp>
         <p:nvSpPr>
-          <p:cNvPr id="6" name="Text 4"/>
+          <p:cNvPr id="5" name="Text 2"/>
           <p:cNvSpPr/>
           <p:nvPr/>
         </p:nvSpPr>
@@ -1538,7 +1505,7 @@
       </p:sp>
       <p:sp>
         <p:nvSpPr>
-          <p:cNvPr id="7" name="Text 5"/>
+          <p:cNvPr id="6" name="Text 3"/>
           <p:cNvSpPr/>
           <p:nvPr/>
         </p:nvSpPr>
@@ -1632,72 +1599,39 @@
           <a:ln/>
         </p:spPr>
       </p:sp>
-      <p:sp>
-        <p:nvSpPr>
-          <p:cNvPr id="3" name="Shape 1"/>
-          <p:cNvSpPr/>
+      <p:pic>
+        <p:nvPicPr>
+          <p:cNvPr id="3" name="Image 0" descr="preencoded.png">    </p:cNvPr>
+          <p:cNvPicPr>
+            <a:picLocks noChangeAspect="1"/>
+          </p:cNvPicPr>
           <p:nvPr/>
-        </p:nvSpPr>
+        </p:nvPicPr>
+        <p:blipFill>
+          <a:blip r:embed="rId1">
+            <a:extLst>
+              <a:ext uri="{96DAC541-7B7A-43D3-8B79-37D633B846F1}">
+                <asvg:svgBlip xmlns:asvg="http://schemas.microsoft.com/office/drawing/2016/SVG/main" r:embed="rId2"/>
+              </a:ext>
+            </a:extLst>
+          </a:blip>
+          <a:stretch>
+            <a:fillRect/>
+          </a:stretch>
+        </p:blipFill>
         <p:spPr>
           <a:xfrm>
             <a:off x="1333500" y="1905000"/>
             <a:ext cx="857250" cy="857250"/>
           </a:xfrm>
-          <a:prstGeom prst="roundRect">
-            <a:avLst/>
-          </a:prstGeom>
-          <a:solidFill>
-            <a:srgbClr val="FFFFFF">
-              <a:alpha val="15000"/>
-            </a:srgbClr>
-          </a:solidFill>
-          <a:ln w="12700">
-            <a:solidFill>
-              <a:srgbClr val="FFFFFF"/>
-            </a:solidFill>
-            <a:prstDash val="dash"/>
-          </a:ln>
-        </p:spPr>
-      </p:sp>
-      <p:sp>
-        <p:nvSpPr>
-          <p:cNvPr id="4" name="Text 2"/>
-          <p:cNvSpPr/>
-          <p:nvPr/>
-        </p:nvSpPr>
-        <p:spPr>
-          <a:xfrm>
-            <a:off x="1333500" y="1905000"/>
-            <a:ext cx="857250" cy="857250"/>
-          </a:xfrm>
           <a:prstGeom prst="rect">
             <a:avLst/>
           </a:prstGeom>
-          <a:noFill/>
-          <a:ln/>
-        </p:spPr>
-        <p:txBody>
-          <a:bodyPr wrap="square" rtlCol="0" anchor="ctr"/>
-          <a:lstStyle/>
-          <a:p>
-            <a:pPr algn="ctr" indent="0" marL="0">
-              <a:buNone/>
-            </a:pPr>
-            <a:r>
-              <a:rPr lang="en-US" sz="800" dirty="0">
-                <a:solidFill>
-                  <a:srgbClr val="FFFFFF"/>
-                </a:solidFill>
-              </a:rPr>
-              <a:t>check</a:t>
-            </a:r>
-            <a:endParaRPr lang="en-US" sz="800" dirty="0"/>
-          </a:p>
-        </p:txBody>
-      </p:sp>
-      <p:sp>
-        <p:nvSpPr>
-          <p:cNvPr id="5" name="Text 3"/>
+        </p:spPr>
+      </p:pic>
+      <p:sp>
+        <p:nvSpPr>
+          <p:cNvPr id="4" name="Text 1"/>
           <p:cNvSpPr/>
           <p:nvPr/>
         </p:nvSpPr>
@@ -1739,7 +1673,7 @@
       </p:sp>
       <p:sp>
         <p:nvSpPr>
-          <p:cNvPr id="6" name="Text 4"/>
+          <p:cNvPr id="5" name="Text 2"/>
           <p:cNvSpPr/>
           <p:nvPr/>
         </p:nvSpPr>
@@ -1781,7 +1715,7 @@
       </p:sp>
       <p:sp>
         <p:nvSpPr>
-          <p:cNvPr id="7" name="Text 5"/>
+          <p:cNvPr id="6" name="Text 3"/>
           <p:cNvSpPr/>
           <p:nvPr/>
         </p:nvSpPr>
@@ -1875,72 +1809,39 @@
           <a:ln/>
         </p:spPr>
       </p:sp>
-      <p:sp>
-        <p:nvSpPr>
-          <p:cNvPr id="3" name="Shape 1"/>
-          <p:cNvSpPr/>
+      <p:pic>
+        <p:nvPicPr>
+          <p:cNvPr id="3" name="Image 0" descr="preencoded.png">    </p:cNvPr>
+          <p:cNvPicPr>
+            <a:picLocks noChangeAspect="1"/>
+          </p:cNvPicPr>
           <p:nvPr/>
-        </p:nvSpPr>
+        </p:nvPicPr>
+        <p:blipFill>
+          <a:blip r:embed="rId1">
+            <a:extLst>
+              <a:ext uri="{96DAC541-7B7A-43D3-8B79-37D633B846F1}">
+                <asvg:svgBlip xmlns:asvg="http://schemas.microsoft.com/office/drawing/2016/SVG/main" r:embed="rId2"/>
+              </a:ext>
+            </a:extLst>
+          </a:blip>
+          <a:stretch>
+            <a:fillRect/>
+          </a:stretch>
+        </p:blipFill>
         <p:spPr>
           <a:xfrm>
             <a:off x="1333500" y="1905000"/>
             <a:ext cx="857250" cy="857250"/>
           </a:xfrm>
-          <a:prstGeom prst="roundRect">
-            <a:avLst/>
-          </a:prstGeom>
-          <a:solidFill>
-            <a:srgbClr val="FFFFFF">
-              <a:alpha val="15000"/>
-            </a:srgbClr>
-          </a:solidFill>
-          <a:ln w="12700">
-            <a:solidFill>
-              <a:srgbClr val="FFFFFF"/>
-            </a:solidFill>
-            <a:prstDash val="dash"/>
-          </a:ln>
-        </p:spPr>
-      </p:sp>
-      <p:sp>
-        <p:nvSpPr>
-          <p:cNvPr id="4" name="Text 2"/>
-          <p:cNvSpPr/>
-          <p:nvPr/>
-        </p:nvSpPr>
-        <p:spPr>
-          <a:xfrm>
-            <a:off x="1333500" y="1905000"/>
-            <a:ext cx="857250" cy="857250"/>
-          </a:xfrm>
           <a:prstGeom prst="rect">
             <a:avLst/>
           </a:prstGeom>
-          <a:noFill/>
-          <a:ln/>
-        </p:spPr>
-        <p:txBody>
-          <a:bodyPr wrap="square" rtlCol="0" anchor="ctr"/>
-          <a:lstStyle/>
-          <a:p>
-            <a:pPr algn="ctr" indent="0" marL="0">
-              <a:buNone/>
-            </a:pPr>
-            <a:r>
-              <a:rPr lang="en-US" sz="800" dirty="0">
-                <a:solidFill>
-                  <a:srgbClr val="FFFFFF"/>
-                </a:solidFill>
-              </a:rPr>
-              <a:t>check</a:t>
-            </a:r>
-            <a:endParaRPr lang="en-US" sz="800" dirty="0"/>
-          </a:p>
-        </p:txBody>
-      </p:sp>
-      <p:sp>
-        <p:nvSpPr>
-          <p:cNvPr id="5" name="Text 3"/>
+        </p:spPr>
+      </p:pic>
+      <p:sp>
+        <p:nvSpPr>
+          <p:cNvPr id="4" name="Text 1"/>
           <p:cNvSpPr/>
           <p:nvPr/>
         </p:nvSpPr>
@@ -1982,7 +1883,7 @@
       </p:sp>
       <p:sp>
         <p:nvSpPr>
-          <p:cNvPr id="6" name="Text 4"/>
+          <p:cNvPr id="5" name="Text 2"/>
           <p:cNvSpPr/>
           <p:nvPr/>
         </p:nvSpPr>
@@ -2024,7 +1925,7 @@
       </p:sp>
       <p:sp>
         <p:nvSpPr>
-          <p:cNvPr id="7" name="Text 5"/>
+          <p:cNvPr id="6" name="Text 3"/>
           <p:cNvSpPr/>
           <p:nvPr/>
         </p:nvSpPr>
